--- a/12-opakovani/cviceni-12.pptx
+++ b/12-opakovani/cviceni-12.pptx
@@ -287,6 +287,13 @@
               <a:schemeClr val="lt1"/>
             </a:fontRef>
           </p:style>
+          <p:txBody>
+            <a:bodyPr/>
+            <a:lstStyle/>
+            <a:p>
+              <a:endParaRPr lang="cs-CZ"/>
+            </a:p>
+          </p:txBody>
         </p:sp>
         <p:sp>
           <p:nvSpPr>
@@ -350,6 +357,13 @@
               <a:schemeClr val="lt1"/>
             </a:fontRef>
           </p:style>
+          <p:txBody>
+            <a:bodyPr/>
+            <a:lstStyle/>
+            <a:p>
+              <a:endParaRPr lang="cs-CZ"/>
+            </a:p>
+          </p:txBody>
         </p:sp>
         <p:sp>
           <p:nvSpPr>
@@ -391,6 +405,13 @@
               <a:schemeClr val="lt1"/>
             </a:fontRef>
           </p:style>
+          <p:txBody>
+            <a:bodyPr/>
+            <a:lstStyle/>
+            <a:p>
+              <a:endParaRPr lang="cs-CZ"/>
+            </a:p>
+          </p:txBody>
         </p:sp>
         <p:sp>
           <p:nvSpPr>
@@ -455,6 +476,13 @@
               <a:schemeClr val="lt1"/>
             </a:fontRef>
           </p:style>
+          <p:txBody>
+            <a:bodyPr/>
+            <a:lstStyle/>
+            <a:p>
+              <a:endParaRPr lang="cs-CZ"/>
+            </a:p>
+          </p:txBody>
         </p:sp>
         <p:sp>
           <p:nvSpPr>
@@ -520,6 +548,13 @@
               <a:schemeClr val="lt1"/>
             </a:fontRef>
           </p:style>
+          <p:txBody>
+            <a:bodyPr/>
+            <a:lstStyle/>
+            <a:p>
+              <a:endParaRPr lang="cs-CZ"/>
+            </a:p>
+          </p:txBody>
         </p:sp>
         <p:sp>
           <p:nvSpPr>
@@ -583,6 +618,13 @@
               <a:schemeClr val="lt1"/>
             </a:fontRef>
           </p:style>
+          <p:txBody>
+            <a:bodyPr/>
+            <a:lstStyle/>
+            <a:p>
+              <a:endParaRPr lang="cs-CZ"/>
+            </a:p>
+          </p:txBody>
         </p:sp>
         <p:sp>
           <p:nvSpPr>
@@ -624,6 +666,13 @@
               <a:schemeClr val="lt1"/>
             </a:fontRef>
           </p:style>
+          <p:txBody>
+            <a:bodyPr/>
+            <a:lstStyle/>
+            <a:p>
+              <a:endParaRPr lang="cs-CZ"/>
+            </a:p>
+          </p:txBody>
         </p:sp>
         <p:sp>
           <p:nvSpPr>
@@ -665,6 +714,13 @@
               <a:schemeClr val="lt1"/>
             </a:fontRef>
           </p:style>
+          <p:txBody>
+            <a:bodyPr/>
+            <a:lstStyle/>
+            <a:p>
+              <a:endParaRPr lang="cs-CZ"/>
+            </a:p>
+          </p:txBody>
         </p:sp>
       </p:grpSp>
       <p:sp>
@@ -843,7 +899,7 @@
             <a:fld id="{5586B75A-687E-405C-8A0B-8D00578BA2C3}" type="datetimeFigureOut">
               <a:rPr lang="en-US" smtClean="0"/>
               <a:pPr/>
-              <a:t>12/11/2023</a:t>
+              <a:t>12/7/2025</a:t>
             </a:fld>
             <a:endParaRPr lang="en-US" dirty="0"/>
           </a:p>
@@ -1096,7 +1152,7 @@
             <a:fld id="{5586B75A-687E-405C-8A0B-8D00578BA2C3}" type="datetimeFigureOut">
               <a:rPr lang="en-US" smtClean="0"/>
               <a:pPr/>
-              <a:t>12/11/2023</a:t>
+              <a:t>12/7/2025</a:t>
             </a:fld>
             <a:endParaRPr lang="en-US" dirty="0"/>
           </a:p>
@@ -1413,7 +1469,7 @@
             <a:fld id="{5586B75A-687E-405C-8A0B-8D00578BA2C3}" type="datetimeFigureOut">
               <a:rPr lang="en-US" smtClean="0"/>
               <a:pPr/>
-              <a:t>12/11/2023</a:t>
+              <a:t>12/7/2025</a:t>
             </a:fld>
             <a:endParaRPr lang="en-US" dirty="0"/>
           </a:p>
@@ -1743,7 +1799,7 @@
             <a:fld id="{5586B75A-687E-405C-8A0B-8D00578BA2C3}" type="datetimeFigureOut">
               <a:rPr lang="en-US" smtClean="0"/>
               <a:pPr/>
-              <a:t>12/11/2023</a:t>
+              <a:t>12/7/2025</a:t>
             </a:fld>
             <a:endParaRPr lang="en-US" dirty="0"/>
           </a:p>
@@ -2060,7 +2116,7 @@
             <a:fld id="{5586B75A-687E-405C-8A0B-8D00578BA2C3}" type="datetimeFigureOut">
               <a:rPr lang="en-US" smtClean="0"/>
               <a:pPr/>
-              <a:t>12/11/2023</a:t>
+              <a:t>12/7/2025</a:t>
             </a:fld>
             <a:endParaRPr lang="en-US" dirty="0"/>
           </a:p>
@@ -2450,7 +2506,7 @@
             <a:fld id="{5586B75A-687E-405C-8A0B-8D00578BA2C3}" type="datetimeFigureOut">
               <a:rPr lang="en-US" smtClean="0"/>
               <a:pPr/>
-              <a:t>12/11/2023</a:t>
+              <a:t>12/7/2025</a:t>
             </a:fld>
             <a:endParaRPr lang="en-US" dirty="0"/>
           </a:p>
@@ -2622,7 +2678,7 @@
           <a:p>
             <a:fld id="{5F4E5243-F52A-4D37-9694-EB26C6C31910}" type="datetimeFigureOut">
               <a:rPr lang="en-US" smtClean="0"/>
-              <a:t>12/11/2023</a:t>
+              <a:t>12/7/2025</a:t>
             </a:fld>
             <a:endParaRPr lang="en-US" dirty="0"/>
           </a:p>
@@ -2802,7 +2858,7 @@
           <a:p>
             <a:fld id="{3A77B6E1-634A-48DC-9E8B-D894023267EF}" type="datetimeFigureOut">
               <a:rPr lang="en-US" smtClean="0"/>
-              <a:t>12/11/2023</a:t>
+              <a:t>12/7/2025</a:t>
             </a:fld>
             <a:endParaRPr lang="en-US" dirty="0"/>
           </a:p>
@@ -2978,7 +3034,7 @@
           <a:p>
             <a:fld id="{7B2D3E9E-A95C-48F2-B4BF-A71542E0BE9A}" type="datetimeFigureOut">
               <a:rPr lang="en-US" smtClean="0"/>
-              <a:t>12/11/2023</a:t>
+              <a:t>12/7/2025</a:t>
             </a:fld>
             <a:endParaRPr lang="en-US" dirty="0"/>
           </a:p>
@@ -3226,7 +3282,7 @@
             <a:fld id="{5586B75A-687E-405C-8A0B-8D00578BA2C3}" type="datetimeFigureOut">
               <a:rPr lang="en-US" smtClean="0"/>
               <a:pPr/>
-              <a:t>12/11/2023</a:t>
+              <a:t>12/7/2025</a:t>
             </a:fld>
             <a:endParaRPr lang="en-US" dirty="0"/>
           </a:p>
@@ -3459,7 +3515,7 @@
           <a:p>
             <a:fld id="{F12952B5-7A2F-4CC8-B7CE-9234E21C2837}" type="datetimeFigureOut">
               <a:rPr lang="en-US" smtClean="0"/>
-              <a:t>12/11/2023</a:t>
+              <a:t>12/7/2025</a:t>
             </a:fld>
             <a:endParaRPr lang="en-US" dirty="0"/>
           </a:p>
@@ -3833,7 +3889,7 @@
           <a:p>
             <a:fld id="{CE1DA07A-9201-4B4B-BAF2-015AFA30F520}" type="datetimeFigureOut">
               <a:rPr lang="en-US" smtClean="0"/>
-              <a:t>12/11/2023</a:t>
+              <a:t>12/7/2025</a:t>
             </a:fld>
             <a:endParaRPr lang="en-US" dirty="0"/>
           </a:p>
@@ -3956,7 +4012,7 @@
           <a:p>
             <a:fld id="{73D7E00A-486F-4252-8B1D-E32645521F49}" type="datetimeFigureOut">
               <a:rPr lang="en-US" smtClean="0"/>
-              <a:t>12/11/2023</a:t>
+              <a:t>12/7/2025</a:t>
             </a:fld>
             <a:endParaRPr lang="en-US" dirty="0"/>
           </a:p>
@@ -4051,7 +4107,7 @@
           <a:p>
             <a:fld id="{8DDF5F92-E675-4B36-9A60-69A962A68675}" type="datetimeFigureOut">
               <a:rPr lang="en-US" smtClean="0"/>
-              <a:t>12/11/2023</a:t>
+              <a:t>12/7/2025</a:t>
             </a:fld>
             <a:endParaRPr lang="en-US" dirty="0"/>
           </a:p>
@@ -4306,7 +4362,7 @@
           <a:p>
             <a:fld id="{AF6E2C9B-5FA2-460D-9BE7-B0812FC2A6FF}" type="datetimeFigureOut">
               <a:rPr lang="en-US" smtClean="0"/>
-              <a:t>12/11/2023</a:t>
+              <a:t>12/7/2025</a:t>
             </a:fld>
             <a:endParaRPr lang="en-US" dirty="0"/>
           </a:p>
@@ -4571,7 +4627,7 @@
             <a:fld id="{5586B75A-687E-405C-8A0B-8D00578BA2C3}" type="datetimeFigureOut">
               <a:rPr lang="en-US" smtClean="0"/>
               <a:pPr/>
-              <a:t>12/11/2023</a:t>
+              <a:t>12/7/2025</a:t>
             </a:fld>
             <a:endParaRPr lang="en-US" dirty="0"/>
           </a:p>
@@ -4807,6 +4863,13 @@
               <a:schemeClr val="lt1"/>
             </a:fontRef>
           </p:style>
+          <p:txBody>
+            <a:bodyPr/>
+            <a:lstStyle/>
+            <a:p>
+              <a:endParaRPr lang="cs-CZ"/>
+            </a:p>
+          </p:txBody>
         </p:sp>
         <p:sp>
           <p:nvSpPr>
@@ -4870,6 +4933,13 @@
               <a:schemeClr val="lt1"/>
             </a:fontRef>
           </p:style>
+          <p:txBody>
+            <a:bodyPr/>
+            <a:lstStyle/>
+            <a:p>
+              <a:endParaRPr lang="cs-CZ"/>
+            </a:p>
+          </p:txBody>
         </p:sp>
         <p:sp>
           <p:nvSpPr>
@@ -4911,6 +4981,13 @@
               <a:schemeClr val="lt1"/>
             </a:fontRef>
           </p:style>
+          <p:txBody>
+            <a:bodyPr/>
+            <a:lstStyle/>
+            <a:p>
+              <a:endParaRPr lang="cs-CZ"/>
+            </a:p>
+          </p:txBody>
         </p:sp>
         <p:sp>
           <p:nvSpPr>
@@ -4975,6 +5052,13 @@
               <a:schemeClr val="lt1"/>
             </a:fontRef>
           </p:style>
+          <p:txBody>
+            <a:bodyPr/>
+            <a:lstStyle/>
+            <a:p>
+              <a:endParaRPr lang="cs-CZ"/>
+            </a:p>
+          </p:txBody>
         </p:sp>
         <p:sp>
           <p:nvSpPr>
@@ -5040,6 +5124,13 @@
               <a:schemeClr val="lt1"/>
             </a:fontRef>
           </p:style>
+          <p:txBody>
+            <a:bodyPr/>
+            <a:lstStyle/>
+            <a:p>
+              <a:endParaRPr lang="cs-CZ"/>
+            </a:p>
+          </p:txBody>
         </p:sp>
         <p:sp>
           <p:nvSpPr>
@@ -5103,6 +5194,13 @@
               <a:schemeClr val="lt1"/>
             </a:fontRef>
           </p:style>
+          <p:txBody>
+            <a:bodyPr/>
+            <a:lstStyle/>
+            <a:p>
+              <a:endParaRPr lang="cs-CZ"/>
+            </a:p>
+          </p:txBody>
         </p:sp>
         <p:sp>
           <p:nvSpPr>
@@ -5144,6 +5242,13 @@
               <a:schemeClr val="lt1"/>
             </a:fontRef>
           </p:style>
+          <p:txBody>
+            <a:bodyPr/>
+            <a:lstStyle/>
+            <a:p>
+              <a:endParaRPr lang="cs-CZ"/>
+            </a:p>
+          </p:txBody>
         </p:sp>
         <p:sp>
           <p:nvSpPr>
@@ -5185,6 +5290,13 @@
               <a:schemeClr val="lt1"/>
             </a:fontRef>
           </p:style>
+          <p:txBody>
+            <a:bodyPr/>
+            <a:lstStyle/>
+            <a:p>
+              <a:endParaRPr lang="cs-CZ"/>
+            </a:p>
+          </p:txBody>
         </p:sp>
       </p:grpSp>
       <p:sp>
@@ -5318,7 +5430,7 @@
             <a:fld id="{5586B75A-687E-405C-8A0B-8D00578BA2C3}" type="datetimeFigureOut">
               <a:rPr lang="en-US" smtClean="0"/>
               <a:pPr/>
-              <a:t>12/11/2023</a:t>
+              <a:t>12/7/2025</a:t>
             </a:fld>
             <a:endParaRPr lang="en-US" dirty="0"/>
           </a:p>
@@ -8084,8 +8196,8 @@
         </p:nvSpPr>
         <p:spPr>
           <a:xfrm>
-            <a:off x="677334" y="2160589"/>
-            <a:ext cx="8596668" cy="3880773"/>
+            <a:off x="677333" y="2160589"/>
+            <a:ext cx="9018757" cy="3880773"/>
           </a:xfrm>
         </p:spPr>
         <p:txBody>
@@ -8100,11 +8212,10 @@
                   <a:srgbClr val="FFFFFF"/>
                 </a:solidFill>
               </a:rPr>
-              <a:t>Příslušnou otázku si vylosujete podle čísla, které si zvolíte z intervalu od 1 do 1000 </a:t>
-            </a:r>
-          </a:p>
-          <a:p>
-            <a:pPr lvl="1"/>
+              <a:t>Příslušnou otázku si vylosujete podle čísla, které si zvolíte z intervalu od 1 do 100 </a:t>
+            </a:r>
+          </a:p>
+          <a:p>
             <a:r>
               <a:rPr lang="cs-CZ" dirty="0">
                 <a:solidFill>
@@ -8113,20 +8224,33 @@
               </a:rPr>
               <a:t>Vyplňte formulář, který najdete na adrese:</a:t>
             </a:r>
-            <a:br>
+          </a:p>
+          <a:p>
+            <a:pPr marL="457200" lvl="1" indent="0">
+              <a:buNone/>
+            </a:pPr>
+            <a:r>
               <a:rPr lang="cs-CZ" dirty="0">
                 <a:solidFill>
-                  <a:srgbClr val="FFFFFF"/>
-                </a:solidFill>
+                  <a:srgbClr val="FFFF00"/>
+                </a:solidFill>
+                <a:hlinkClick r:id="rId2">
+                  <a:extLst>
+                    <a:ext uri="{A12FA001-AC4F-418D-AE19-62706E023703}">
+                      <ahyp:hlinkClr xmlns:ahyp="http://schemas.microsoft.com/office/drawing/2018/hyperlinkcolor" val="tx"/>
+                    </a:ext>
+                  </a:extLst>
+                </a:hlinkClick>
               </a:rPr>
-            </a:br>
+              <a:t>https://forms.gle/b9xc7FrN4rQP3TqR9</a:t>
+            </a:r>
             <a:r>
               <a:rPr lang="cs-CZ" dirty="0">
                 <a:solidFill>
                   <a:srgbClr val="FFFF00"/>
                 </a:solidFill>
               </a:rPr>
-              <a:t>https://forms.gle/V4DKaoRKhMzA2SCV8</a:t>
+              <a:t> </a:t>
             </a:r>
           </a:p>
         </p:txBody>
@@ -8224,16 +8348,32 @@
           <a:p>
             <a:pPr lvl="1"/>
             <a:r>
-              <a:rPr lang="cs-CZ">
-                <a:hlinkClick r:id="rId2"/>
+              <a:rPr lang="cs-CZ" dirty="0">
+                <a:solidFill>
+                  <a:srgbClr val="FFFF00"/>
+                </a:solidFill>
+                <a:hlinkClick r:id="rId2">
+                  <a:extLst>
+                    <a:ext uri="{A12FA001-AC4F-418D-AE19-62706E023703}">
+                      <ahyp:hlinkClr xmlns:ahyp="http://schemas.microsoft.com/office/drawing/2018/hyperlinkcolor" val="tx"/>
+                    </a:ext>
+                  </a:extLst>
+                </a:hlinkClick>
               </a:rPr>
-              <a:t>https://forms.gle/1vVZXcTgajEUXcpK9</a:t>
-            </a:r>
-            <a:r>
-              <a:rPr lang="cs-CZ"/>
+              <a:t>https://forms.gle/e2sJrd3qCAaDaMki9</a:t>
+            </a:r>
+            <a:r>
+              <a:rPr lang="cs-CZ" dirty="0">
+                <a:solidFill>
+                  <a:srgbClr val="FFFF00"/>
+                </a:solidFill>
+              </a:rPr>
+              <a:t> </a:t>
+            </a:r>
+            <a:r>
+              <a:rPr lang="cs-CZ" dirty="0"/>
               <a:t>  </a:t>
             </a:r>
-            <a:endParaRPr lang="cs-CZ" dirty="0"/>
           </a:p>
         </p:txBody>
       </p:sp>
